--- a/docs/architecture/figure-0-flow.pptx
+++ b/docs/architecture/figure-0-flow.pptx
@@ -8058,8 +8058,8 @@
         </p:nvCxnSpPr>
         <p:spPr>
           <a:xfrm flipH="1">
-            <a:off x="11804904.0" y="5760720"/>
-            <a:ext cx="228600.0" cy="0"/>
+            <a:off x="11804904" y="5760720"/>
+            <a:ext cx="228600" cy="0"/>
           </a:xfrm>
           <a:prstGeom prst="line">
             <a:avLst/>
